--- a/01_Python_Essentials/L01-Intro-installation/01-2_Python-Install-VSCode.pptx
+++ b/01_Python_Essentials/L01-Intro-installation/01-2_Python-Install-VSCode.pptx
@@ -222,7 +222,7 @@
           <a:p>
             <a:fld id="{7BAEECA8-D063-486F-AE31-5020270C1449}" type="datetimeFigureOut">
               <a:rPr lang="en-US" smtClean="0"/>
-              <a:t>1/8/2026</a:t>
+              <a:t>6/13/2026</a:t>
             </a:fld>
             <a:endParaRPr lang="en-US"/>
           </a:p>
@@ -315,6 +315,230 @@
   </p:cSld>
   <p:clrMap bg1="lt1" tx1="dk1" bg2="lt2" tx2="dk2" accent1="accent1" accent2="accent2" accent3="accent3" accent4="accent4" accent5="accent5" accent6="accent6" hlink="hlink" folHlink="folHlink"/>
 </p:handoutMaster>
+</file>
+
+<file path=ppt/ink/ink1.xml><?xml version="1.0" encoding="utf-8"?>
+<inkml:ink xmlns:inkml="http://www.w3.org/2003/InkML">
+  <inkml:definitions>
+    <inkml:context xml:id="ctx0">
+      <inkml:inkSource xml:id="inkSrc0">
+        <inkml:traceFormat>
+          <inkml:channel name="X" type="integer" min="-2.14748E9" max="2.14748E9" units="cm"/>
+          <inkml:channel name="Y" type="integer" min="-2.14748E9" max="2.14748E9" units="cm"/>
+          <inkml:channel name="F" type="integer" max="32767" units="dev"/>
+        </inkml:traceFormat>
+        <inkml:channelProperties>
+          <inkml:channelProperty channel="X" name="resolution" value="1000" units="1/cm"/>
+          <inkml:channelProperty channel="Y" name="resolution" value="1000" units="1/cm"/>
+          <inkml:channelProperty channel="F" name="resolution" value="0" units="1/dev"/>
+        </inkml:channelProperties>
+      </inkml:inkSource>
+      <inkml:timestamp xml:id="ts0" timeString="2026-06-13T06:45:14.249"/>
+    </inkml:context>
+    <inkml:brush xml:id="br0">
+      <inkml:brushProperty name="width" value="0.1" units="cm"/>
+      <inkml:brushProperty name="height" value="0.1" units="cm"/>
+      <inkml:brushProperty name="color" value="#5B2D90"/>
+    </inkml:brush>
+  </inkml:definitions>
+  <inkml:trace contextRef="#ctx0" brushRef="#br0">1 369 24575,'1'17'0,"0"-1"0,2 0 0,0 0 0,1 0 0,0-1 0,1 1 0,14 27 0,62 99 0,-76-134 0,-4-6 0,1 0 0,-1 0 0,0 0 0,1 0 0,-1-1 0,1 1 0,0 0 0,0-1 0,-1 0 0,1 1 0,0-1 0,0 0 0,0 0 0,1 0 0,-1 0 0,0 0 0,0-1 0,0 1 0,1 0 0,-1-1 0,0 0 0,0 0 0,1 0 0,-1 0 0,0 0 0,1 0 0,-1 0 0,0-1 0,5 0 0,4-3 0,1-1 0,-1 0 0,0 0 0,17-12 0,-3 2 0,30-19 0,0-2 0,63-55 0,-7 13 0,-73 53 0,50-42 0,-55 41 0,2 1 0,1 2 0,64-32 0,-50 29 0,58-40 0,-22 16 118,-32 21-1601,-26 12-5343</inkml:trace>
+</inkml:ink>
+</file>
+
+<file path=ppt/ink/ink2.xml><?xml version="1.0" encoding="utf-8"?>
+<inkml:ink xmlns:inkml="http://www.w3.org/2003/InkML">
+  <inkml:definitions>
+    <inkml:context xml:id="ctx0">
+      <inkml:inkSource xml:id="inkSrc0">
+        <inkml:traceFormat>
+          <inkml:channel name="X" type="integer" min="-2.14748E9" max="2.14748E9" units="cm"/>
+          <inkml:channel name="Y" type="integer" min="-2.14748E9" max="2.14748E9" units="cm"/>
+          <inkml:channel name="F" type="integer" max="32767" units="dev"/>
+        </inkml:traceFormat>
+        <inkml:channelProperties>
+          <inkml:channelProperty channel="X" name="resolution" value="1000" units="1/cm"/>
+          <inkml:channelProperty channel="Y" name="resolution" value="1000" units="1/cm"/>
+          <inkml:channelProperty channel="F" name="resolution" value="0" units="1/dev"/>
+        </inkml:channelProperties>
+      </inkml:inkSource>
+      <inkml:timestamp xml:id="ts0" timeString="2026-06-13T06:45:24.907"/>
+    </inkml:context>
+    <inkml:brush xml:id="br0">
+      <inkml:brushProperty name="width" value="0.1" units="cm"/>
+      <inkml:brushProperty name="height" value="0.1" units="cm"/>
+      <inkml:brushProperty name="color" value="#5B2D90"/>
+    </inkml:brush>
+  </inkml:definitions>
+  <inkml:trace contextRef="#ctx0" brushRef="#br0">1 452 24575,'6'1'0,"-1"0"0,1 0 0,0 1 0,-1 0 0,1 0 0,-1 0 0,0 0 0,1 1 0,-1 0 0,0 0 0,-1 0 0,1 1 0,-1 0 0,1 0 0,-1 0 0,6 8 0,-5-6 0,0-1 0,0 0 0,0 0 0,1-1 0,0 1 0,0-1 0,0-1 0,0 1 0,0-1 0,1 0 0,8 3 0,-8-5 0,1-1 0,0 0 0,0 0 0,-1 0 0,1-1 0,0 0 0,-1 0 0,1-1 0,0 0 0,-1-1 0,0 1 0,0-1 0,0-1 0,0 1 0,0-1 0,-1-1 0,1 1 0,9-10 0,11-10 0,-1-2 0,39-49 0,-42 47 0,68-77-27,101-127-1311,-178 213-5488</inkml:trace>
+</inkml:ink>
+</file>
+
+<file path=ppt/ink/ink3.xml><?xml version="1.0" encoding="utf-8"?>
+<inkml:ink xmlns:inkml="http://www.w3.org/2003/InkML">
+  <inkml:definitions>
+    <inkml:context xml:id="ctx0">
+      <inkml:inkSource xml:id="inkSrc0">
+        <inkml:traceFormat>
+          <inkml:channel name="X" type="integer" min="-2.14748E9" max="2.14748E9" units="cm"/>
+          <inkml:channel name="Y" type="integer" min="-2.14748E9" max="2.14748E9" units="cm"/>
+          <inkml:channel name="F" type="integer" max="32767" units="dev"/>
+        </inkml:traceFormat>
+        <inkml:channelProperties>
+          <inkml:channelProperty channel="X" name="resolution" value="1000" units="1/cm"/>
+          <inkml:channelProperty channel="Y" name="resolution" value="1000" units="1/cm"/>
+          <inkml:channelProperty channel="F" name="resolution" value="0" units="1/dev"/>
+        </inkml:channelProperties>
+      </inkml:inkSource>
+      <inkml:timestamp xml:id="ts0" timeString="2026-06-13T06:45:52.998"/>
+    </inkml:context>
+    <inkml:brush xml:id="br0">
+      <inkml:brushProperty name="width" value="0.1" units="cm"/>
+      <inkml:brushProperty name="height" value="0.1" units="cm"/>
+      <inkml:brushProperty name="color" value="#5B2D90"/>
+    </inkml:brush>
+  </inkml:definitions>
+  <inkml:trace contextRef="#ctx0" brushRef="#br0">1 176 24575,'2'17'0,"1"-1"0,0 0 0,2 0 0,0 0 0,0-1 0,2 0 0,0 0 0,13 22 0,3 7 0,-22-42 0,0 1 0,1-1 0,-1 0 0,0 0 0,1 0 0,0 0 0,-1 0 0,1-1 0,0 1 0,0 0 0,0-1 0,0 1 0,0-1 0,1 0 0,-1 0 0,0 0 0,0 0 0,1 0 0,-1 0 0,1-1 0,-1 1 0,1-1 0,-1 1 0,1-1 0,-1 0 0,1 0 0,-1 0 0,1-1 0,-1 1 0,1 0 0,-1-1 0,3-1 0,9-2 0,0-1 0,-1 0 0,0-1 0,18-11 0,-20 11 0,43-27 0,-1-3 0,63-55 0,-59 44 0,72-45 0,-52 45-1365,-41 24-5461</inkml:trace>
+</inkml:ink>
+</file>
+
+<file path=ppt/ink/ink4.xml><?xml version="1.0" encoding="utf-8"?>
+<inkml:ink xmlns:inkml="http://www.w3.org/2003/InkML">
+  <inkml:definitions>
+    <inkml:context xml:id="ctx0">
+      <inkml:inkSource xml:id="inkSrc0">
+        <inkml:traceFormat>
+          <inkml:channel name="X" type="integer" min="-2.14748E9" max="2.14748E9" units="cm"/>
+          <inkml:channel name="Y" type="integer" min="-2.14748E9" max="2.14748E9" units="cm"/>
+          <inkml:channel name="F" type="integer" max="32767" units="dev"/>
+        </inkml:traceFormat>
+        <inkml:channelProperties>
+          <inkml:channelProperty channel="X" name="resolution" value="1000" units="1/cm"/>
+          <inkml:channelProperty channel="Y" name="resolution" value="1000" units="1/cm"/>
+          <inkml:channelProperty channel="F" name="resolution" value="0" units="1/dev"/>
+        </inkml:channelProperties>
+      </inkml:inkSource>
+      <inkml:timestamp xml:id="ts0" timeString="2026-06-13T06:45:54.891"/>
+    </inkml:context>
+    <inkml:brush xml:id="br0">
+      <inkml:brushProperty name="width" value="0.1" units="cm"/>
+      <inkml:brushProperty name="height" value="0.1" units="cm"/>
+      <inkml:brushProperty name="color" value="#5B2D90"/>
+    </inkml:brush>
+  </inkml:definitions>
+  <inkml:trace contextRef="#ctx0" brushRef="#br0">1 303 24575,'1'0'0,"0"-1"0,0 0 0,0 0 0,0 0 0,0 1 0,0-1 0,0 0 0,0 1 0,0-1 0,1 1 0,-1 0 0,0-1 0,0 1 0,1 0 0,-1 0 0,0-1 0,0 1 0,1 0 0,-1 0 0,0 1 0,1-1 0,-1 0 0,0 0 0,0 1 0,1-1 0,-1 0 0,0 1 0,0 0 0,0-1 0,0 1 0,1-1 0,-1 1 0,0 0 0,0 0 0,0 0 0,-1 0 0,1 0 0,1 1 0,30 42 0,-30-41 0,46 89 0,-34-61 0,2-1 0,1 0 0,24 30 0,-38-56 0,1 0 0,0-1 0,0 1 0,0-1 0,0 0 0,0-1 0,1 1 0,-1-1 0,1 1 0,-1-2 0,1 1 0,0 0 0,0-1 0,0 0 0,0 0 0,9 1 0,4-2 0,0 0 0,1-1 0,23-4 0,25-6 0,-1-4 0,-1-2 0,68-29 0,191-93 0,-117 46 0,-10 14-47,-41 18-612,159-88 0,-279 127-6167</inkml:trace>
+</inkml:ink>
+</file>
+
+<file path=ppt/ink/ink5.xml><?xml version="1.0" encoding="utf-8"?>
+<inkml:ink xmlns:inkml="http://www.w3.org/2003/InkML">
+  <inkml:definitions>
+    <inkml:context xml:id="ctx0">
+      <inkml:inkSource xml:id="inkSrc0">
+        <inkml:traceFormat>
+          <inkml:channel name="X" type="integer" min="-2.14748E9" max="2.14748E9" units="cm"/>
+          <inkml:channel name="Y" type="integer" min="-2.14748E9" max="2.14748E9" units="cm"/>
+          <inkml:channel name="F" type="integer" max="32767" units="dev"/>
+        </inkml:traceFormat>
+        <inkml:channelProperties>
+          <inkml:channelProperty channel="X" name="resolution" value="1000" units="1/cm"/>
+          <inkml:channelProperty channel="Y" name="resolution" value="1000" units="1/cm"/>
+          <inkml:channelProperty channel="F" name="resolution" value="0" units="1/dev"/>
+        </inkml:channelProperties>
+      </inkml:inkSource>
+      <inkml:timestamp xml:id="ts0" timeString="2026-06-13T06:45:56.964"/>
+    </inkml:context>
+    <inkml:brush xml:id="br0">
+      <inkml:brushProperty name="width" value="0.1" units="cm"/>
+      <inkml:brushProperty name="height" value="0.1" units="cm"/>
+      <inkml:brushProperty name="color" value="#5B2D90"/>
+    </inkml:brush>
+  </inkml:definitions>
+  <inkml:trace contextRef="#ctx0" brushRef="#br0">1 665 24575,'1'10'0,"1"0"0,1 0 0,0-1 0,0 0 0,1 1 0,0-1 0,1-1 0,7 13 0,3 6 0,25 60 0,-23-47 0,1 0 0,26 37 0,-43-76 0,0 0 0,0 0 0,0 0 0,0 0 0,0 0 0,1-1 0,-1 1 0,0 0 0,0-1 0,1 1 0,-1-1 0,0 1 0,1-1 0,-1 0 0,1 0 0,-1 1 0,0-1 0,1 0 0,-1 0 0,1 0 0,-1-1 0,1 1 0,-1 0 0,0 0 0,1-1 0,-1 1 0,0-1 0,1 1 0,-1-1 0,0 0 0,2-1 0,50-31 0,-38 23 0,339-209 0,9 15 0,447-179 0,-426 220-1365,-327 140-5461</inkml:trace>
+</inkml:ink>
+</file>
+
+<file path=ppt/ink/ink6.xml><?xml version="1.0" encoding="utf-8"?>
+<inkml:ink xmlns:inkml="http://www.w3.org/2003/InkML">
+  <inkml:definitions>
+    <inkml:context xml:id="ctx0">
+      <inkml:inkSource xml:id="inkSrc0">
+        <inkml:traceFormat>
+          <inkml:channel name="X" type="integer" min="-2.14748E9" max="2.14748E9" units="cm"/>
+          <inkml:channel name="Y" type="integer" min="-2.14748E9" max="2.14748E9" units="cm"/>
+          <inkml:channel name="F" type="integer" max="32767" units="dev"/>
+        </inkml:traceFormat>
+        <inkml:channelProperties>
+          <inkml:channelProperty channel="X" name="resolution" value="1000" units="1/cm"/>
+          <inkml:channelProperty channel="Y" name="resolution" value="1000" units="1/cm"/>
+          <inkml:channelProperty channel="F" name="resolution" value="0" units="1/dev"/>
+        </inkml:channelProperties>
+      </inkml:inkSource>
+      <inkml:timestamp xml:id="ts0" timeString="2026-06-13T06:46:11.858"/>
+    </inkml:context>
+    <inkml:brush xml:id="br0">
+      <inkml:brushProperty name="width" value="0.1" units="cm"/>
+      <inkml:brushProperty name="height" value="0.1" units="cm"/>
+      <inkml:brushProperty name="color" value="#5B2D90"/>
+    </inkml:brush>
+  </inkml:definitions>
+  <inkml:trace contextRef="#ctx0" brushRef="#br0">1 465 24575,'0'0'0,"0"0"0,0-1 0,0 1 0,0-1 0,0 1 0,0 0 0,0-1 0,0 1 0,0-1 0,0 1 0,0 0 0,1-1 0,-1 1 0,0-1 0,0 1 0,0 0 0,1-1 0,-1 1 0,0 0 0,0-1 0,1 1 0,-1 0 0,0 0 0,1-1 0,-1 1 0,0 0 0,1 0 0,-1 0 0,1-1 0,-1 1 0,0 0 0,1 0 0,-1 0 0,1 0 0,-1 0 0,0 0 0,1 0 0,22 5 0,16 16 0,-30-11 0,0 0 0,0 1 0,-1 0 0,10 16 0,-12-16 0,1 0 0,0-1 0,1 0 0,0-1 0,18 17 0,-23-24 0,0 0 0,0 0 0,1 0 0,-1 0 0,1-1 0,-1 0 0,1 1 0,-1-1 0,1-1 0,0 1 0,0 0 0,-1-1 0,1 0 0,0 0 0,0 0 0,-1 0 0,1-1 0,0 1 0,0-1 0,-1 0 0,1 0 0,-1 0 0,1-1 0,3-2 0,3-2 0,0-1 0,-1 0 0,0 0 0,0-1 0,-1-1 0,0 1 0,0-1 0,-1-1 0,0 1 0,-1-1 0,6-11 0,-2 3 0,2 1 0,18-21 0,112-127 22,-92 103-485,3 1 1,99-86 0,-134 133-6364</inkml:trace>
+</inkml:ink>
+</file>
+
+<file path=ppt/ink/ink7.xml><?xml version="1.0" encoding="utf-8"?>
+<inkml:ink xmlns:inkml="http://www.w3.org/2003/InkML">
+  <inkml:definitions>
+    <inkml:context xml:id="ctx0">
+      <inkml:inkSource xml:id="inkSrc0">
+        <inkml:traceFormat>
+          <inkml:channel name="X" type="integer" min="-2.14748E9" max="2.14748E9" units="cm"/>
+          <inkml:channel name="Y" type="integer" min="-2.14748E9" max="2.14748E9" units="cm"/>
+          <inkml:channel name="F" type="integer" max="32767" units="dev"/>
+        </inkml:traceFormat>
+        <inkml:channelProperties>
+          <inkml:channelProperty channel="X" name="resolution" value="1000" units="1/cm"/>
+          <inkml:channelProperty channel="Y" name="resolution" value="1000" units="1/cm"/>
+          <inkml:channelProperty channel="F" name="resolution" value="0" units="1/dev"/>
+        </inkml:channelProperties>
+      </inkml:inkSource>
+      <inkml:timestamp xml:id="ts0" timeString="2026-06-13T06:47:03.582"/>
+    </inkml:context>
+    <inkml:brush xml:id="br0">
+      <inkml:brushProperty name="width" value="0.1" units="cm"/>
+      <inkml:brushProperty name="height" value="0.1" units="cm"/>
+      <inkml:brushProperty name="color" value="#5B2D90"/>
+    </inkml:brush>
+  </inkml:definitions>
+  <inkml:trace contextRef="#ctx0" brushRef="#br0">1 636 24575,'0'0'0,"0"-1"0,0 1 0,0-1 0,0 1 0,0-1 0,1 0 0,-1 1 0,0-1 0,0 1 0,1-1 0,-1 1 0,0-1 0,1 1 0,-1-1 0,1 1 0,-1 0 0,1-1 0,-1 1 0,0 0 0,1-1 0,-1 1 0,1 0 0,0-1 0,-1 1 0,1 0 0,-1 0 0,1 0 0,-1-1 0,1 1 0,-1 0 0,1 0 0,0 0 0,-1 0 0,1 0 0,-1 0 0,1 0 0,0 0 0,-1 0 0,1 1 0,-1-1 0,1 0 0,-1 0 0,2 1 0,25 10 0,-9 5 0,-1 0 0,-1 1 0,0 0 0,-1 2 0,-2 0 0,1 0 0,18 39 0,-17-29 0,2-1 0,1-1 0,31 35 0,-45-57 0,1 1 0,0-2 0,0 1 0,0-1 0,1 1 0,-1-1 0,1-1 0,0 1 0,12 4 0,-14-7 0,0 0 0,1-1 0,-1 0 0,0 1 0,0-2 0,1 1 0,-1 0 0,0-1 0,0 0 0,0 0 0,0 0 0,0 0 0,0-1 0,0 1 0,0-1 0,0 0 0,4-3 0,25-17 0,-2-2 0,0-1 0,51-54 0,0 1 0,-50 47 0,30-37 0,-44 46 0,1 0 0,1 2 0,1 0 0,1 1 0,27-18 0,30-16 0,74-66 0,-1-1 0,-93 78 0,151-115 0,-187 137-1365,-5 1-5461</inkml:trace>
+</inkml:ink>
+</file>
+
+<file path=ppt/ink/ink8.xml><?xml version="1.0" encoding="utf-8"?>
+<inkml:ink xmlns:inkml="http://www.w3.org/2003/InkML">
+  <inkml:definitions>
+    <inkml:context xml:id="ctx0">
+      <inkml:inkSource xml:id="inkSrc0">
+        <inkml:traceFormat>
+          <inkml:channel name="X" type="integer" min="-2.14748E9" max="2.14748E9" units="cm"/>
+          <inkml:channel name="Y" type="integer" min="-2.14748E9" max="2.14748E9" units="cm"/>
+          <inkml:channel name="F" type="integer" max="32767" units="dev"/>
+        </inkml:traceFormat>
+        <inkml:channelProperties>
+          <inkml:channelProperty channel="X" name="resolution" value="1000" units="1/cm"/>
+          <inkml:channelProperty channel="Y" name="resolution" value="1000" units="1/cm"/>
+          <inkml:channelProperty channel="F" name="resolution" value="0" units="1/dev"/>
+        </inkml:channelProperties>
+      </inkml:inkSource>
+      <inkml:timestamp xml:id="ts0" timeString="2026-06-13T06:47:55.412"/>
+    </inkml:context>
+    <inkml:brush xml:id="br0">
+      <inkml:brushProperty name="width" value="0.1" units="cm"/>
+      <inkml:brushProperty name="height" value="0.1" units="cm"/>
+      <inkml:brushProperty name="color" value="#5B2D90"/>
+    </inkml:brush>
+  </inkml:definitions>
+  <inkml:trace contextRef="#ctx0" brushRef="#br0">1 711 24575,'3'1'0,"0"-1"0,1 1 0,-1 0 0,0 0 0,0 0 0,0 0 0,0 0 0,0 1 0,0-1 0,0 1 0,0 0 0,0 0 0,-1 0 0,1 0 0,-1 0 0,0 1 0,4 4 0,37 57 0,-17-23 0,-1-6 0,-17-22 0,0-1 0,1 0 0,1 0 0,0-1 0,0 0 0,16 11 0,-23-20 0,-1-1 0,1 0 0,0 0 0,0 0 0,0 0 0,-1-1 0,1 1 0,0-1 0,0 1 0,0-1 0,0 0 0,0 0 0,0-1 0,0 1 0,0 0 0,0-1 0,0 0 0,0 0 0,0 0 0,-1 0 0,1 0 0,0-1 0,-1 1 0,3-2 0,9-6 0,0-1 0,-1 0 0,13-12 0,-18 15 0,34-35 0,-1-1 0,43-61 0,-39 48 0,-16 24 0,49-44 0,-50 52 0,-2-2 0,45-55 0,-44 46 16,1 1 0,2 1 0,1 2 0,47-37 0,148-91-625,-158 114-227,-32 20-5990</inkml:trace>
+</inkml:ink>
 </file>
 
 <file path=ppt/notesMasters/notesMaster1.xml><?xml version="1.0" encoding="utf-8"?>
@@ -399,7 +623,7 @@
           <a:p>
             <a:fld id="{E0F4871E-3672-42BE-BBA1-0BAFEE555536}" type="datetimeFigureOut">
               <a:rPr lang="en-US" smtClean="0"/>
-              <a:t>1/8/2026</a:t>
+              <a:t>6/13/2026</a:t>
             </a:fld>
             <a:endParaRPr lang="en-US"/>
           </a:p>
@@ -813,7 +1037,7 @@
           <a:p>
             <a:fld id="{6383FAE1-13DE-4511-8C1B-C8AFB720664C}" type="datetimeFigureOut">
               <a:rPr lang="en-US" smtClean="0"/>
-              <a:t>1/8/2026</a:t>
+              <a:t>6/13/2026</a:t>
             </a:fld>
             <a:endParaRPr lang="en-US"/>
           </a:p>
@@ -1011,7 +1235,7 @@
           <a:p>
             <a:fld id="{6383FAE1-13DE-4511-8C1B-C8AFB720664C}" type="datetimeFigureOut">
               <a:rPr lang="en-US" smtClean="0"/>
-              <a:t>1/8/2026</a:t>
+              <a:t>6/13/2026</a:t>
             </a:fld>
             <a:endParaRPr lang="en-US"/>
           </a:p>
@@ -1219,7 +1443,7 @@
           <a:p>
             <a:fld id="{6383FAE1-13DE-4511-8C1B-C8AFB720664C}" type="datetimeFigureOut">
               <a:rPr lang="en-US" smtClean="0"/>
-              <a:t>1/8/2026</a:t>
+              <a:t>6/13/2026</a:t>
             </a:fld>
             <a:endParaRPr lang="en-US"/>
           </a:p>
@@ -1417,7 +1641,7 @@
           <a:p>
             <a:fld id="{6383FAE1-13DE-4511-8C1B-C8AFB720664C}" type="datetimeFigureOut">
               <a:rPr lang="en-US" smtClean="0"/>
-              <a:t>1/8/2026</a:t>
+              <a:t>6/13/2026</a:t>
             </a:fld>
             <a:endParaRPr lang="en-US"/>
           </a:p>
@@ -1692,7 +1916,7 @@
           <a:p>
             <a:fld id="{6383FAE1-13DE-4511-8C1B-C8AFB720664C}" type="datetimeFigureOut">
               <a:rPr lang="en-US" smtClean="0"/>
-              <a:t>1/8/2026</a:t>
+              <a:t>6/13/2026</a:t>
             </a:fld>
             <a:endParaRPr lang="en-US"/>
           </a:p>
@@ -1957,7 +2181,7 @@
           <a:p>
             <a:fld id="{6383FAE1-13DE-4511-8C1B-C8AFB720664C}" type="datetimeFigureOut">
               <a:rPr lang="en-US" smtClean="0"/>
-              <a:t>1/8/2026</a:t>
+              <a:t>6/13/2026</a:t>
             </a:fld>
             <a:endParaRPr lang="en-US"/>
           </a:p>
@@ -2369,7 +2593,7 @@
           <a:p>
             <a:fld id="{6383FAE1-13DE-4511-8C1B-C8AFB720664C}" type="datetimeFigureOut">
               <a:rPr lang="en-US" smtClean="0"/>
-              <a:t>1/8/2026</a:t>
+              <a:t>6/13/2026</a:t>
             </a:fld>
             <a:endParaRPr lang="en-US"/>
           </a:p>
@@ -2510,7 +2734,7 @@
           <a:p>
             <a:fld id="{6383FAE1-13DE-4511-8C1B-C8AFB720664C}" type="datetimeFigureOut">
               <a:rPr lang="en-US" smtClean="0"/>
-              <a:t>1/8/2026</a:t>
+              <a:t>6/13/2026</a:t>
             </a:fld>
             <a:endParaRPr lang="en-US"/>
           </a:p>
@@ -2623,7 +2847,7 @@
           <a:p>
             <a:fld id="{6383FAE1-13DE-4511-8C1B-C8AFB720664C}" type="datetimeFigureOut">
               <a:rPr lang="en-US" smtClean="0"/>
-              <a:t>1/8/2026</a:t>
+              <a:t>6/13/2026</a:t>
             </a:fld>
             <a:endParaRPr lang="en-US"/>
           </a:p>
@@ -2934,7 +3158,7 @@
           <a:p>
             <a:fld id="{6383FAE1-13DE-4511-8C1B-C8AFB720664C}" type="datetimeFigureOut">
               <a:rPr lang="en-US" smtClean="0"/>
-              <a:t>1/8/2026</a:t>
+              <a:t>6/13/2026</a:t>
             </a:fld>
             <a:endParaRPr lang="en-US"/>
           </a:p>
@@ -3225,7 +3449,7 @@
           <a:p>
             <a:fld id="{6383FAE1-13DE-4511-8C1B-C8AFB720664C}" type="datetimeFigureOut">
               <a:rPr lang="en-US" smtClean="0"/>
-              <a:t>1/8/2026</a:t>
+              <a:t>6/13/2026</a:t>
             </a:fld>
             <a:endParaRPr lang="en-US"/>
           </a:p>
@@ -3469,7 +3693,7 @@
           <a:p>
             <a:fld id="{6383FAE1-13DE-4511-8C1B-C8AFB720664C}" type="datetimeFigureOut">
               <a:rPr lang="en-US" smtClean="0"/>
-              <a:t>1/8/2026</a:t>
+              <a:t>6/13/2026</a:t>
             </a:fld>
             <a:endParaRPr lang="en-US"/>
           </a:p>
@@ -4158,8 +4382,8 @@
         </p:blipFill>
         <p:spPr>
           <a:xfrm>
-            <a:off x="5492591" y="1130710"/>
-            <a:ext cx="6227332" cy="5038238"/>
+            <a:off x="4858686" y="685808"/>
+            <a:ext cx="7223187" cy="5843937"/>
           </a:xfrm>
           <a:prstGeom prst="rect">
             <a:avLst/>
@@ -4181,7 +4405,7 @@
         <p:spPr>
           <a:xfrm>
             <a:off x="29717" y="1636098"/>
-            <a:ext cx="5462873" cy="4524315"/>
+            <a:ext cx="4694683" cy="4893647"/>
           </a:xfrm>
           <a:prstGeom prst="rect">
             <a:avLst/>
@@ -4423,6 +4647,108 @@
           </a:p>
         </p:txBody>
       </p:sp>
+      <mc:AlternateContent xmlns:mc="http://schemas.openxmlformats.org/markup-compatibility/2006">
+        <mc:Choice xmlns:p14="http://schemas.microsoft.com/office/powerpoint/2010/main" Requires="p14">
+          <p:contentPart p14:bwMode="auto" r:id="rId4">
+            <p14:nvContentPartPr>
+              <p14:cNvPr id="3" name="Ink 2">
+                <a:extLst>
+                  <a:ext uri="{FF2B5EF4-FFF2-40B4-BE49-F238E27FC236}">
+                    <a16:creationId xmlns:a16="http://schemas.microsoft.com/office/drawing/2014/main" id="{87DC21A7-853E-D6FC-0D64-5FABA82B4399}"/>
+                  </a:ext>
+                </a:extLst>
+              </p14:cNvPr>
+              <p14:cNvContentPartPr/>
+              <p14:nvPr/>
+            </p14:nvContentPartPr>
+            <p14:xfrm>
+              <a:off x="7257915" y="5248815"/>
+              <a:ext cx="462240" cy="252720"/>
+            </p14:xfrm>
+          </p:contentPart>
+        </mc:Choice>
+        <mc:Fallback>
+          <p:pic>
+            <p:nvPicPr>
+              <p:cNvPr id="3" name="Ink 2">
+                <a:extLst>
+                  <a:ext uri="{FF2B5EF4-FFF2-40B4-BE49-F238E27FC236}">
+                    <a16:creationId xmlns:a16="http://schemas.microsoft.com/office/drawing/2014/main" id="{87DC21A7-853E-D6FC-0D64-5FABA82B4399}"/>
+                  </a:ext>
+                </a:extLst>
+              </p:cNvPr>
+              <p:cNvPicPr/>
+              <p:nvPr/>
+            </p:nvPicPr>
+            <p:blipFill>
+              <a:blip r:embed="rId5"/>
+              <a:stretch>
+                <a:fillRect/>
+              </a:stretch>
+            </p:blipFill>
+            <p:spPr>
+              <a:xfrm>
+                <a:off x="7240275" y="5230815"/>
+                <a:ext cx="497880" cy="288360"/>
+              </a:xfrm>
+              <a:prstGeom prst="rect">
+                <a:avLst/>
+              </a:prstGeom>
+            </p:spPr>
+          </p:pic>
+        </mc:Fallback>
+      </mc:AlternateContent>
+      <mc:AlternateContent xmlns:mc="http://schemas.openxmlformats.org/markup-compatibility/2006">
+        <mc:Choice xmlns:p14="http://schemas.microsoft.com/office/powerpoint/2010/main" Requires="p14">
+          <p:contentPart p14:bwMode="auto" r:id="rId6">
+            <p14:nvContentPartPr>
+              <p14:cNvPr id="4" name="Ink 3">
+                <a:extLst>
+                  <a:ext uri="{FF2B5EF4-FFF2-40B4-BE49-F238E27FC236}">
+                    <a16:creationId xmlns:a16="http://schemas.microsoft.com/office/drawing/2014/main" id="{796A0BE8-90C8-A240-D49A-2EE27D52032F}"/>
+                  </a:ext>
+                </a:extLst>
+              </p14:cNvPr>
+              <p14:cNvContentPartPr/>
+              <p14:nvPr/>
+            </p14:nvContentPartPr>
+            <p14:xfrm>
+              <a:off x="10372635" y="5837775"/>
+              <a:ext cx="272520" cy="201600"/>
+            </p14:xfrm>
+          </p:contentPart>
+        </mc:Choice>
+        <mc:Fallback>
+          <p:pic>
+            <p:nvPicPr>
+              <p:cNvPr id="4" name="Ink 3">
+                <a:extLst>
+                  <a:ext uri="{FF2B5EF4-FFF2-40B4-BE49-F238E27FC236}">
+                    <a16:creationId xmlns:a16="http://schemas.microsoft.com/office/drawing/2014/main" id="{796A0BE8-90C8-A240-D49A-2EE27D52032F}"/>
+                  </a:ext>
+                </a:extLst>
+              </p:cNvPr>
+              <p:cNvPicPr/>
+              <p:nvPr/>
+            </p:nvPicPr>
+            <p:blipFill>
+              <a:blip r:embed="rId7"/>
+              <a:stretch>
+                <a:fillRect/>
+              </a:stretch>
+            </p:blipFill>
+            <p:spPr>
+              <a:xfrm>
+                <a:off x="10354995" y="5820135"/>
+                <a:ext cx="308160" cy="237240"/>
+              </a:xfrm>
+              <a:prstGeom prst="rect">
+                <a:avLst/>
+              </a:prstGeom>
+            </p:spPr>
+          </p:pic>
+        </mc:Fallback>
+      </mc:AlternateContent>
     </p:spTree>
     <p:extLst>
       <p:ext uri="{BB962C8B-B14F-4D97-AF65-F5344CB8AC3E}">
@@ -4538,8 +4864,8 @@
         </p:blipFill>
         <p:spPr>
           <a:xfrm>
-            <a:off x="5166360" y="1045566"/>
-            <a:ext cx="6979097" cy="5726697"/>
+            <a:off x="4686300" y="651654"/>
+            <a:ext cx="7459157" cy="6120610"/>
           </a:xfrm>
           <a:prstGeom prst="rect">
             <a:avLst/>
@@ -4564,8 +4890,8 @@
         </p:nvSpPr>
         <p:spPr>
           <a:xfrm>
-            <a:off x="838200" y="197981"/>
-            <a:ext cx="10515600" cy="618101"/>
+            <a:off x="207166" y="169406"/>
+            <a:ext cx="5153025" cy="618101"/>
           </a:xfrm>
         </p:spPr>
         <p:txBody>
@@ -4582,6 +4908,210 @@
           </a:p>
         </p:txBody>
       </p:sp>
+      <mc:AlternateContent xmlns:mc="http://schemas.openxmlformats.org/markup-compatibility/2006">
+        <mc:Choice xmlns:p14="http://schemas.microsoft.com/office/powerpoint/2010/main" Requires="p14">
+          <p:contentPart p14:bwMode="auto" r:id="rId3">
+            <p14:nvContentPartPr>
+              <p14:cNvPr id="2" name="Ink 1">
+                <a:extLst>
+                  <a:ext uri="{FF2B5EF4-FFF2-40B4-BE49-F238E27FC236}">
+                    <a16:creationId xmlns:a16="http://schemas.microsoft.com/office/drawing/2014/main" id="{8B2ECD9B-CDC8-72B2-E987-F3042008C886}"/>
+                  </a:ext>
+                </a:extLst>
+              </p14:cNvPr>
+              <p14:cNvContentPartPr/>
+              <p14:nvPr/>
+            </p14:nvContentPartPr>
+            <p14:xfrm>
+              <a:off x="7829235" y="4384815"/>
+              <a:ext cx="277560" cy="150120"/>
+            </p14:xfrm>
+          </p:contentPart>
+        </mc:Choice>
+        <mc:Fallback>
+          <p:pic>
+            <p:nvPicPr>
+              <p:cNvPr id="2" name="Ink 1">
+                <a:extLst>
+                  <a:ext uri="{FF2B5EF4-FFF2-40B4-BE49-F238E27FC236}">
+                    <a16:creationId xmlns:a16="http://schemas.microsoft.com/office/drawing/2014/main" id="{8B2ECD9B-CDC8-72B2-E987-F3042008C886}"/>
+                  </a:ext>
+                </a:extLst>
+              </p:cNvPr>
+              <p:cNvPicPr/>
+              <p:nvPr/>
+            </p:nvPicPr>
+            <p:blipFill>
+              <a:blip r:embed="rId4"/>
+              <a:stretch>
+                <a:fillRect/>
+              </a:stretch>
+            </p:blipFill>
+            <p:spPr>
+              <a:xfrm>
+                <a:off x="7811595" y="4367175"/>
+                <a:ext cx="313200" cy="185760"/>
+              </a:xfrm>
+              <a:prstGeom prst="rect">
+                <a:avLst/>
+              </a:prstGeom>
+            </p:spPr>
+          </p:pic>
+        </mc:Fallback>
+      </mc:AlternateContent>
+      <mc:AlternateContent xmlns:mc="http://schemas.openxmlformats.org/markup-compatibility/2006">
+        <mc:Choice xmlns:p14="http://schemas.microsoft.com/office/powerpoint/2010/main" Requires="p14">
+          <p:contentPart p14:bwMode="auto" r:id="rId5">
+            <p14:nvContentPartPr>
+              <p14:cNvPr id="4" name="Ink 3">
+                <a:extLst>
+                  <a:ext uri="{FF2B5EF4-FFF2-40B4-BE49-F238E27FC236}">
+                    <a16:creationId xmlns:a16="http://schemas.microsoft.com/office/drawing/2014/main" id="{EEF14543-95DF-2370-FA60-8BB71698948D}"/>
+                  </a:ext>
+                </a:extLst>
+              </p14:cNvPr>
+              <p14:cNvContentPartPr/>
+              <p14:nvPr/>
+            </p14:nvContentPartPr>
+            <p14:xfrm>
+              <a:off x="8715195" y="4024455"/>
+              <a:ext cx="706680" cy="230040"/>
+            </p14:xfrm>
+          </p:contentPart>
+        </mc:Choice>
+        <mc:Fallback>
+          <p:pic>
+            <p:nvPicPr>
+              <p:cNvPr id="4" name="Ink 3">
+                <a:extLst>
+                  <a:ext uri="{FF2B5EF4-FFF2-40B4-BE49-F238E27FC236}">
+                    <a16:creationId xmlns:a16="http://schemas.microsoft.com/office/drawing/2014/main" id="{EEF14543-95DF-2370-FA60-8BB71698948D}"/>
+                  </a:ext>
+                </a:extLst>
+              </p:cNvPr>
+              <p:cNvPicPr/>
+              <p:nvPr/>
+            </p:nvPicPr>
+            <p:blipFill>
+              <a:blip r:embed="rId6"/>
+              <a:stretch>
+                <a:fillRect/>
+              </a:stretch>
+            </p:blipFill>
+            <p:spPr>
+              <a:xfrm>
+                <a:off x="8697555" y="4006455"/>
+                <a:ext cx="742320" cy="265680"/>
+              </a:xfrm>
+              <a:prstGeom prst="rect">
+                <a:avLst/>
+              </a:prstGeom>
+            </p:spPr>
+          </p:pic>
+        </mc:Fallback>
+      </mc:AlternateContent>
+      <mc:AlternateContent xmlns:mc="http://schemas.openxmlformats.org/markup-compatibility/2006">
+        <mc:Choice xmlns:p14="http://schemas.microsoft.com/office/powerpoint/2010/main" Requires="p14">
+          <p:contentPart p14:bwMode="auto" r:id="rId7">
+            <p14:nvContentPartPr>
+              <p14:cNvPr id="5" name="Ink 4">
+                <a:extLst>
+                  <a:ext uri="{FF2B5EF4-FFF2-40B4-BE49-F238E27FC236}">
+                    <a16:creationId xmlns:a16="http://schemas.microsoft.com/office/drawing/2014/main" id="{368924E0-5FC5-D382-AF61-7A1B1D497DDA}"/>
+                  </a:ext>
+                </a:extLst>
+              </p14:cNvPr>
+              <p14:cNvContentPartPr/>
+              <p14:nvPr/>
+            </p14:nvContentPartPr>
+            <p14:xfrm>
+              <a:off x="7029315" y="2637015"/>
+              <a:ext cx="810360" cy="375480"/>
+            </p14:xfrm>
+          </p:contentPart>
+        </mc:Choice>
+        <mc:Fallback>
+          <p:pic>
+            <p:nvPicPr>
+              <p:cNvPr id="5" name="Ink 4">
+                <a:extLst>
+                  <a:ext uri="{FF2B5EF4-FFF2-40B4-BE49-F238E27FC236}">
+                    <a16:creationId xmlns:a16="http://schemas.microsoft.com/office/drawing/2014/main" id="{368924E0-5FC5-D382-AF61-7A1B1D497DDA}"/>
+                  </a:ext>
+                </a:extLst>
+              </p:cNvPr>
+              <p:cNvPicPr/>
+              <p:nvPr/>
+            </p:nvPicPr>
+            <p:blipFill>
+              <a:blip r:embed="rId8"/>
+              <a:stretch>
+                <a:fillRect/>
+              </a:stretch>
+            </p:blipFill>
+            <p:spPr>
+              <a:xfrm>
+                <a:off x="7011675" y="2619375"/>
+                <a:ext cx="846000" cy="411120"/>
+              </a:xfrm>
+              <a:prstGeom prst="rect">
+                <a:avLst/>
+              </a:prstGeom>
+            </p:spPr>
+          </p:pic>
+        </mc:Fallback>
+      </mc:AlternateContent>
+      <mc:AlternateContent xmlns:mc="http://schemas.openxmlformats.org/markup-compatibility/2006">
+        <mc:Choice xmlns:p14="http://schemas.microsoft.com/office/powerpoint/2010/main" Requires="p14">
+          <p:contentPart p14:bwMode="auto" r:id="rId9">
+            <p14:nvContentPartPr>
+              <p14:cNvPr id="8" name="Ink 7">
+                <a:extLst>
+                  <a:ext uri="{FF2B5EF4-FFF2-40B4-BE49-F238E27FC236}">
+                    <a16:creationId xmlns:a16="http://schemas.microsoft.com/office/drawing/2014/main" id="{1A70D1FF-933A-92CE-A15C-724EF08F64A4}"/>
+                  </a:ext>
+                </a:extLst>
+              </p14:cNvPr>
+              <p14:cNvContentPartPr/>
+              <p14:nvPr/>
+            </p14:nvContentPartPr>
+            <p14:xfrm>
+              <a:off x="10296315" y="6052335"/>
+              <a:ext cx="306000" cy="232200"/>
+            </p14:xfrm>
+          </p:contentPart>
+        </mc:Choice>
+        <mc:Fallback>
+          <p:pic>
+            <p:nvPicPr>
+              <p:cNvPr id="8" name="Ink 7">
+                <a:extLst>
+                  <a:ext uri="{FF2B5EF4-FFF2-40B4-BE49-F238E27FC236}">
+                    <a16:creationId xmlns:a16="http://schemas.microsoft.com/office/drawing/2014/main" id="{1A70D1FF-933A-92CE-A15C-724EF08F64A4}"/>
+                  </a:ext>
+                </a:extLst>
+              </p:cNvPr>
+              <p:cNvPicPr/>
+              <p:nvPr/>
+            </p:nvPicPr>
+            <p:blipFill>
+              <a:blip r:embed="rId10"/>
+              <a:stretch>
+                <a:fillRect/>
+              </a:stretch>
+            </p:blipFill>
+            <p:spPr>
+              <a:xfrm>
+                <a:off x="10278675" y="6034335"/>
+                <a:ext cx="341640" cy="267840"/>
+              </a:xfrm>
+              <a:prstGeom prst="rect">
+                <a:avLst/>
+              </a:prstGeom>
+            </p:spPr>
+          </p:pic>
+        </mc:Fallback>
+      </mc:AlternateContent>
     </p:spTree>
     <p:extLst>
       <p:ext uri="{BB962C8B-B14F-4D97-AF65-F5344CB8AC3E}">
@@ -4646,8 +5176,8 @@
         </p:blipFill>
         <p:spPr>
           <a:xfrm>
-            <a:off x="5258300" y="934067"/>
-            <a:ext cx="6615397" cy="5241138"/>
+            <a:off x="4393519" y="711307"/>
+            <a:ext cx="7640748" cy="6053487"/>
           </a:xfrm>
           <a:prstGeom prst="rect">
             <a:avLst/>
@@ -4672,8 +5202,8 @@
         </p:nvSpPr>
         <p:spPr>
           <a:xfrm>
-            <a:off x="838200" y="197981"/>
-            <a:ext cx="10515600" cy="618101"/>
+            <a:off x="236279" y="93206"/>
+            <a:ext cx="4943475" cy="618101"/>
           </a:xfrm>
         </p:spPr>
         <p:txBody>
@@ -4705,7 +5235,7 @@
         <p:spPr>
           <a:xfrm>
             <a:off x="157734" y="1521244"/>
-            <a:ext cx="5100566" cy="1200329"/>
+            <a:ext cx="4328541" cy="1569660"/>
           </a:xfrm>
           <a:prstGeom prst="rect">
             <a:avLst/>
@@ -4775,6 +5305,57 @@
           </a:p>
         </p:txBody>
       </p:sp>
+      <mc:AlternateContent xmlns:mc="http://schemas.openxmlformats.org/markup-compatibility/2006">
+        <mc:Choice xmlns:p14="http://schemas.microsoft.com/office/powerpoint/2010/main" Requires="p14">
+          <p:contentPart p14:bwMode="auto" r:id="rId3">
+            <p14:nvContentPartPr>
+              <p14:cNvPr id="2" name="Ink 1">
+                <a:extLst>
+                  <a:ext uri="{FF2B5EF4-FFF2-40B4-BE49-F238E27FC236}">
+                    <a16:creationId xmlns:a16="http://schemas.microsoft.com/office/drawing/2014/main" id="{69E0F416-346D-4DA6-7172-E43385C5E941}"/>
+                  </a:ext>
+                </a:extLst>
+              </p14:cNvPr>
+              <p14:cNvContentPartPr/>
+              <p14:nvPr/>
+            </p14:nvContentPartPr>
+            <p14:xfrm>
+              <a:off x="10020195" y="6048015"/>
+              <a:ext cx="585720" cy="365760"/>
+            </p14:xfrm>
+          </p:contentPart>
+        </mc:Choice>
+        <mc:Fallback>
+          <p:pic>
+            <p:nvPicPr>
+              <p:cNvPr id="2" name="Ink 1">
+                <a:extLst>
+                  <a:ext uri="{FF2B5EF4-FFF2-40B4-BE49-F238E27FC236}">
+                    <a16:creationId xmlns:a16="http://schemas.microsoft.com/office/drawing/2014/main" id="{69E0F416-346D-4DA6-7172-E43385C5E941}"/>
+                  </a:ext>
+                </a:extLst>
+              </p:cNvPr>
+              <p:cNvPicPr/>
+              <p:nvPr/>
+            </p:nvPicPr>
+            <p:blipFill>
+              <a:blip r:embed="rId4"/>
+              <a:stretch>
+                <a:fillRect/>
+              </a:stretch>
+            </p:blipFill>
+            <p:spPr>
+              <a:xfrm>
+                <a:off x="10002555" y="6030015"/>
+                <a:ext cx="621360" cy="401400"/>
+              </a:xfrm>
+              <a:prstGeom prst="rect">
+                <a:avLst/>
+              </a:prstGeom>
+            </p:spPr>
+          </p:pic>
+        </mc:Fallback>
+      </mc:AlternateContent>
     </p:spTree>
     <p:extLst>
       <p:ext uri="{BB962C8B-B14F-4D97-AF65-F5344CB8AC3E}">
@@ -4829,8 +5410,8 @@
         </p:nvSpPr>
         <p:spPr>
           <a:xfrm>
-            <a:off x="838200" y="197981"/>
-            <a:ext cx="10515600" cy="618101"/>
+            <a:off x="157734" y="121781"/>
+            <a:ext cx="5100566" cy="618101"/>
           </a:xfrm>
         </p:spPr>
         <p:txBody>
@@ -4862,7 +5443,7 @@
         <p:spPr>
           <a:xfrm>
             <a:off x="157734" y="1521244"/>
-            <a:ext cx="5100566" cy="1200329"/>
+            <a:ext cx="4385691" cy="1569660"/>
           </a:xfrm>
           <a:prstGeom prst="rect">
             <a:avLst/>
@@ -4954,14 +5535,65 @@
         </p:blipFill>
         <p:spPr>
           <a:xfrm>
-            <a:off x="5800325" y="1685614"/>
-            <a:ext cx="5734850" cy="4458322"/>
+            <a:off x="4845051" y="942975"/>
+            <a:ext cx="7353974" cy="5717043"/>
           </a:xfrm>
           <a:prstGeom prst="rect">
             <a:avLst/>
           </a:prstGeom>
         </p:spPr>
       </p:pic>
+      <mc:AlternateContent xmlns:mc="http://schemas.openxmlformats.org/markup-compatibility/2006">
+        <mc:Choice xmlns:p14="http://schemas.microsoft.com/office/powerpoint/2010/main" Requires="p14">
+          <p:contentPart p14:bwMode="auto" r:id="rId3">
+            <p14:nvContentPartPr>
+              <p14:cNvPr id="2" name="Ink 1">
+                <a:extLst>
+                  <a:ext uri="{FF2B5EF4-FFF2-40B4-BE49-F238E27FC236}">
+                    <a16:creationId xmlns:a16="http://schemas.microsoft.com/office/drawing/2014/main" id="{033DC5C7-0DE8-17A2-D64C-8FABDC6E66C6}"/>
+                  </a:ext>
+                </a:extLst>
+              </p14:cNvPr>
+              <p14:cNvContentPartPr/>
+              <p14:nvPr/>
+            </p14:nvContentPartPr>
+            <p14:xfrm>
+              <a:off x="10848555" y="5811495"/>
+              <a:ext cx="484920" cy="354960"/>
+            </p14:xfrm>
+          </p:contentPart>
+        </mc:Choice>
+        <mc:Fallback>
+          <p:pic>
+            <p:nvPicPr>
+              <p:cNvPr id="2" name="Ink 1">
+                <a:extLst>
+                  <a:ext uri="{FF2B5EF4-FFF2-40B4-BE49-F238E27FC236}">
+                    <a16:creationId xmlns:a16="http://schemas.microsoft.com/office/drawing/2014/main" id="{033DC5C7-0DE8-17A2-D64C-8FABDC6E66C6}"/>
+                  </a:ext>
+                </a:extLst>
+              </p:cNvPr>
+              <p:cNvPicPr/>
+              <p:nvPr/>
+            </p:nvPicPr>
+            <p:blipFill>
+              <a:blip r:embed="rId4"/>
+              <a:stretch>
+                <a:fillRect/>
+              </a:stretch>
+            </p:blipFill>
+            <p:spPr>
+              <a:xfrm>
+                <a:off x="10830915" y="5793495"/>
+                <a:ext cx="520560" cy="390600"/>
+              </a:xfrm>
+              <a:prstGeom prst="rect">
+                <a:avLst/>
+              </a:prstGeom>
+            </p:spPr>
+          </p:pic>
+        </mc:Fallback>
+      </mc:AlternateContent>
     </p:spTree>
     <p:extLst>
       <p:ext uri="{BB962C8B-B14F-4D97-AF65-F5344CB8AC3E}">
@@ -5186,7 +5818,7 @@
                   </a:schemeClr>
                 </a:solidFill>
               </a:rPr>
-              <a:t>miscrosoft</a:t>
+              <a:t>microsoft</a:t>
             </a:r>
             <a:r>
               <a:rPr lang="en-IN" sz="2400" b="1" dirty="0">
